--- a/hmi/dev/ui/portrait/NSPanel - US.pptx
+++ b/hmi/dev/ui/portrait/NSPanel - US.pptx
@@ -5,8 +5,8 @@
     <p:sldMasterId id="2147483672" r:id="rId1"/>
   </p:sldMasterIdLst>
   <p:sldIdLst>
-    <p:sldId id="258" r:id="rId2"/>
-    <p:sldId id="264" r:id="rId3"/>
+    <p:sldId id="264" r:id="rId2"/>
+    <p:sldId id="258" r:id="rId3"/>
     <p:sldId id="265" r:id="rId4"/>
     <p:sldId id="263" r:id="rId5"/>
     <p:sldId id="260" r:id="rId6"/>
@@ -502,7 +502,7 @@
           <a:p>
             <a:fld id="{024B8AE9-66EA-4D6A-A8A7-9C9BEADD6B50}" type="datetimeFigureOut">
               <a:rPr lang="en-SE" smtClean="0"/>
-              <a:t>2026-04-05</a:t>
+              <a:t>2026-04-12</a:t>
             </a:fld>
             <a:endParaRPr lang="en-SE"/>
           </a:p>
@@ -672,7 +672,7 @@
           <a:p>
             <a:fld id="{024B8AE9-66EA-4D6A-A8A7-9C9BEADD6B50}" type="datetimeFigureOut">
               <a:rPr lang="en-SE" smtClean="0"/>
-              <a:t>2026-04-05</a:t>
+              <a:t>2026-04-12</a:t>
             </a:fld>
             <a:endParaRPr lang="en-SE"/>
           </a:p>
@@ -852,7 +852,7 @@
           <a:p>
             <a:fld id="{024B8AE9-66EA-4D6A-A8A7-9C9BEADD6B50}" type="datetimeFigureOut">
               <a:rPr lang="en-SE" smtClean="0"/>
-              <a:t>2026-04-05</a:t>
+              <a:t>2026-04-12</a:t>
             </a:fld>
             <a:endParaRPr lang="en-SE"/>
           </a:p>
@@ -1022,7 +1022,7 @@
           <a:p>
             <a:fld id="{024B8AE9-66EA-4D6A-A8A7-9C9BEADD6B50}" type="datetimeFigureOut">
               <a:rPr lang="en-SE" smtClean="0"/>
-              <a:t>2026-04-05</a:t>
+              <a:t>2026-04-12</a:t>
             </a:fld>
             <a:endParaRPr lang="en-SE"/>
           </a:p>
@@ -1266,7 +1266,7 @@
           <a:p>
             <a:fld id="{024B8AE9-66EA-4D6A-A8A7-9C9BEADD6B50}" type="datetimeFigureOut">
               <a:rPr lang="en-SE" smtClean="0"/>
-              <a:t>2026-04-05</a:t>
+              <a:t>2026-04-12</a:t>
             </a:fld>
             <a:endParaRPr lang="en-SE"/>
           </a:p>
@@ -1498,7 +1498,7 @@
           <a:p>
             <a:fld id="{024B8AE9-66EA-4D6A-A8A7-9C9BEADD6B50}" type="datetimeFigureOut">
               <a:rPr lang="en-SE" smtClean="0"/>
-              <a:t>2026-04-05</a:t>
+              <a:t>2026-04-12</a:t>
             </a:fld>
             <a:endParaRPr lang="en-SE"/>
           </a:p>
@@ -1865,7 +1865,7 @@
           <a:p>
             <a:fld id="{024B8AE9-66EA-4D6A-A8A7-9C9BEADD6B50}" type="datetimeFigureOut">
               <a:rPr lang="en-SE" smtClean="0"/>
-              <a:t>2026-04-05</a:t>
+              <a:t>2026-04-12</a:t>
             </a:fld>
             <a:endParaRPr lang="en-SE"/>
           </a:p>
@@ -1983,7 +1983,7 @@
           <a:p>
             <a:fld id="{024B8AE9-66EA-4D6A-A8A7-9C9BEADD6B50}" type="datetimeFigureOut">
               <a:rPr lang="en-SE" smtClean="0"/>
-              <a:t>2026-04-05</a:t>
+              <a:t>2026-04-12</a:t>
             </a:fld>
             <a:endParaRPr lang="en-SE"/>
           </a:p>
@@ -2078,7 +2078,7 @@
           <a:p>
             <a:fld id="{024B8AE9-66EA-4D6A-A8A7-9C9BEADD6B50}" type="datetimeFigureOut">
               <a:rPr lang="en-SE" smtClean="0"/>
-              <a:t>2026-04-05</a:t>
+              <a:t>2026-04-12</a:t>
             </a:fld>
             <a:endParaRPr lang="en-SE"/>
           </a:p>
@@ -2355,7 +2355,7 @@
           <a:p>
             <a:fld id="{024B8AE9-66EA-4D6A-A8A7-9C9BEADD6B50}" type="datetimeFigureOut">
               <a:rPr lang="en-SE" smtClean="0"/>
-              <a:t>2026-04-05</a:t>
+              <a:t>2026-04-12</a:t>
             </a:fld>
             <a:endParaRPr lang="en-SE"/>
           </a:p>
@@ -2612,7 +2612,7 @@
           <a:p>
             <a:fld id="{024B8AE9-66EA-4D6A-A8A7-9C9BEADD6B50}" type="datetimeFigureOut">
               <a:rPr lang="en-SE" smtClean="0"/>
-              <a:t>2026-04-05</a:t>
+              <a:t>2026-04-12</a:t>
             </a:fld>
             <a:endParaRPr lang="en-SE"/>
           </a:p>
@@ -2825,7 +2825,7 @@
           <a:p>
             <a:fld id="{024B8AE9-66EA-4D6A-A8A7-9C9BEADD6B50}" type="datetimeFigureOut">
               <a:rPr lang="en-SE" smtClean="0"/>
-              <a:t>2026-04-05</a:t>
+              <a:t>2026-04-12</a:t>
             </a:fld>
             <a:endParaRPr lang="en-SE"/>
           </a:p>
@@ -3218,72 +3218,6 @@
   <p:cSld>
     <p:spTree>
       <p:nvGrpSpPr>
-        <p:cNvPr id="1" name=""/>
-        <p:cNvGrpSpPr/>
-        <p:nvPr/>
-      </p:nvGrpSpPr>
-      <p:grpSpPr>
-        <a:xfrm>
-          <a:off x="0" y="0"/>
-          <a:ext cx="0" cy="0"/>
-          <a:chOff x="0" y="0"/>
-          <a:chExt cx="0" cy="0"/>
-        </a:xfrm>
-      </p:grpSpPr>
-      <p:pic>
-        <p:nvPicPr>
-          <p:cNvPr id="4" name="Picture 3" descr="A colorful waves on a black background&#10;&#10;Description automatically generated">
-            <a:extLst>
-              <a:ext uri="{FF2B5EF4-FFF2-40B4-BE49-F238E27FC236}">
-                <a16:creationId xmlns:a16="http://schemas.microsoft.com/office/drawing/2014/main" id="{F086EAF8-13C6-23DD-1547-4E35A34A1D12}"/>
-              </a:ext>
-            </a:extLst>
-          </p:cNvPr>
-          <p:cNvPicPr>
-            <a:picLocks noChangeAspect="1"/>
-          </p:cNvPicPr>
-          <p:nvPr/>
-        </p:nvPicPr>
-        <p:blipFill>
-          <a:blip r:embed="rId2">
-            <a:extLst>
-              <a:ext uri="{28A0092B-C50C-407E-A947-70E740481C1C}">
-                <a14:useLocalDpi xmlns:a14="http://schemas.microsoft.com/office/drawing/2010/main" val="0"/>
-              </a:ext>
-            </a:extLst>
-          </a:blip>
-          <a:stretch>
-            <a:fillRect/>
-          </a:stretch>
-        </p:blipFill>
-        <p:spPr>
-          <a:xfrm>
-            <a:off x="0" y="0"/>
-            <a:ext cx="3048000" cy="4572000"/>
-          </a:xfrm>
-          <a:prstGeom prst="rect">
-            <a:avLst/>
-          </a:prstGeom>
-        </p:spPr>
-      </p:pic>
-    </p:spTree>
-    <p:extLst>
-      <p:ext uri="{BB962C8B-B14F-4D97-AF65-F5344CB8AC3E}">
-        <p14:creationId xmlns:p14="http://schemas.microsoft.com/office/powerpoint/2010/main" val="220686341"/>
-      </p:ext>
-    </p:extLst>
-  </p:cSld>
-  <p:clrMapOvr>
-    <a:masterClrMapping/>
-  </p:clrMapOvr>
-</p:sld>
-</file>
-
-<file path=ppt/slides/slide2.xml><?xml version="1.0" encoding="utf-8"?>
-<p:sld xmlns:a="http://schemas.openxmlformats.org/drawingml/2006/main" xmlns:r="http://schemas.openxmlformats.org/officeDocument/2006/relationships" xmlns:p="http://schemas.openxmlformats.org/presentationml/2006/main">
-  <p:cSld>
-    <p:spTree>
-      <p:nvGrpSpPr>
         <p:cNvPr id="1" name="">
           <a:extLst>
             <a:ext uri="{FF2B5EF4-FFF2-40B4-BE49-F238E27FC236}">
@@ -3342,6 +3276,339 @@
     <p:extLst>
       <p:ext uri="{BB962C8B-B14F-4D97-AF65-F5344CB8AC3E}">
         <p14:creationId xmlns:p14="http://schemas.microsoft.com/office/powerpoint/2010/main" val="1788303187"/>
+      </p:ext>
+    </p:extLst>
+  </p:cSld>
+  <p:clrMapOvr>
+    <a:masterClrMapping/>
+  </p:clrMapOvr>
+</p:sld>
+</file>
+
+<file path=ppt/slides/slide2.xml><?xml version="1.0" encoding="utf-8"?>
+<p:sld xmlns:a="http://schemas.openxmlformats.org/drawingml/2006/main" xmlns:r="http://schemas.openxmlformats.org/officeDocument/2006/relationships" xmlns:p="http://schemas.openxmlformats.org/presentationml/2006/main">
+  <p:cSld>
+    <p:spTree>
+      <p:nvGrpSpPr>
+        <p:cNvPr id="1" name=""/>
+        <p:cNvGrpSpPr/>
+        <p:nvPr/>
+      </p:nvGrpSpPr>
+      <p:grpSpPr>
+        <a:xfrm>
+          <a:off x="0" y="0"/>
+          <a:ext cx="0" cy="0"/>
+          <a:chOff x="0" y="0"/>
+          <a:chExt cx="0" cy="0"/>
+        </a:xfrm>
+      </p:grpSpPr>
+      <p:pic>
+        <p:nvPicPr>
+          <p:cNvPr id="4" name="Picture 3" descr="A colorful waves on a black background&#10;&#10;Description automatically generated">
+            <a:extLst>
+              <a:ext uri="{FF2B5EF4-FFF2-40B4-BE49-F238E27FC236}">
+                <a16:creationId xmlns:a16="http://schemas.microsoft.com/office/drawing/2014/main" id="{F086EAF8-13C6-23DD-1547-4E35A34A1D12}"/>
+              </a:ext>
+            </a:extLst>
+          </p:cNvPr>
+          <p:cNvPicPr>
+            <a:picLocks noChangeAspect="1"/>
+          </p:cNvPicPr>
+          <p:nvPr/>
+        </p:nvPicPr>
+        <p:blipFill>
+          <a:blip r:embed="rId2">
+            <a:extLst>
+              <a:ext uri="{28A0092B-C50C-407E-A947-70E740481C1C}">
+                <a14:useLocalDpi xmlns:a14="http://schemas.microsoft.com/office/drawing/2010/main" val="0"/>
+              </a:ext>
+            </a:extLst>
+          </a:blip>
+          <a:stretch>
+            <a:fillRect/>
+          </a:stretch>
+        </p:blipFill>
+        <p:spPr>
+          <a:xfrm>
+            <a:off x="0" y="0"/>
+            <a:ext cx="3048000" cy="4572000"/>
+          </a:xfrm>
+          <a:prstGeom prst="rect">
+            <a:avLst/>
+          </a:prstGeom>
+        </p:spPr>
+      </p:pic>
+      <p:sp>
+        <p:nvSpPr>
+          <p:cNvPr id="3" name="Rectangle: Rounded Corners 2">
+            <a:extLst>
+              <a:ext uri="{FF2B5EF4-FFF2-40B4-BE49-F238E27FC236}">
+                <a16:creationId xmlns:a16="http://schemas.microsoft.com/office/drawing/2014/main" id="{09B08120-9D17-864E-1011-05FFE74AE836}"/>
+              </a:ext>
+            </a:extLst>
+          </p:cNvPr>
+          <p:cNvSpPr/>
+          <p:nvPr/>
+        </p:nvSpPr>
+        <p:spPr>
+          <a:xfrm>
+            <a:off x="333375" y="3505200"/>
+            <a:ext cx="571500" cy="571500"/>
+          </a:xfrm>
+          <a:prstGeom prst="roundRect">
+            <a:avLst/>
+          </a:prstGeom>
+          <a:solidFill>
+            <a:srgbClr val="2C2C2C"/>
+          </a:solidFill>
+          <a:ln>
+            <a:noFill/>
+          </a:ln>
+        </p:spPr>
+        <p:style>
+          <a:lnRef idx="2">
+            <a:schemeClr val="accent1">
+              <a:shade val="15000"/>
+            </a:schemeClr>
+          </a:lnRef>
+          <a:fillRef idx="1">
+            <a:schemeClr val="accent1"/>
+          </a:fillRef>
+          <a:effectRef idx="0">
+            <a:schemeClr val="accent1"/>
+          </a:effectRef>
+          <a:fontRef idx="minor">
+            <a:schemeClr val="lt1"/>
+          </a:fontRef>
+        </p:style>
+        <p:txBody>
+          <a:bodyPr rtlCol="0" anchor="ctr"/>
+          <a:lstStyle/>
+          <a:p>
+            <a:pPr algn="ctr"/>
+            <a:endParaRPr lang="en-SE"/>
+          </a:p>
+        </p:txBody>
+      </p:sp>
+      <p:sp>
+        <p:nvSpPr>
+          <p:cNvPr id="5" name="Rectangle: Rounded Corners 4">
+            <a:extLst>
+              <a:ext uri="{FF2B5EF4-FFF2-40B4-BE49-F238E27FC236}">
+                <a16:creationId xmlns:a16="http://schemas.microsoft.com/office/drawing/2014/main" id="{F886C877-B4B9-3A97-DED5-33F582B6DABD}"/>
+              </a:ext>
+            </a:extLst>
+          </p:cNvPr>
+          <p:cNvSpPr/>
+          <p:nvPr/>
+        </p:nvSpPr>
+        <p:spPr>
+          <a:xfrm>
+            <a:off x="1238250" y="3505200"/>
+            <a:ext cx="571500" cy="571500"/>
+          </a:xfrm>
+          <a:prstGeom prst="roundRect">
+            <a:avLst/>
+          </a:prstGeom>
+          <a:solidFill>
+            <a:srgbClr val="2C2C2C"/>
+          </a:solidFill>
+          <a:ln>
+            <a:noFill/>
+          </a:ln>
+        </p:spPr>
+        <p:style>
+          <a:lnRef idx="2">
+            <a:schemeClr val="accent1">
+              <a:shade val="15000"/>
+            </a:schemeClr>
+          </a:lnRef>
+          <a:fillRef idx="1">
+            <a:schemeClr val="accent1"/>
+          </a:fillRef>
+          <a:effectRef idx="0">
+            <a:schemeClr val="accent1"/>
+          </a:effectRef>
+          <a:fontRef idx="minor">
+            <a:schemeClr val="lt1"/>
+          </a:fontRef>
+        </p:style>
+        <p:txBody>
+          <a:bodyPr rtlCol="0" anchor="ctr"/>
+          <a:lstStyle/>
+          <a:p>
+            <a:pPr algn="ctr"/>
+            <a:endParaRPr lang="en-SE"/>
+          </a:p>
+        </p:txBody>
+      </p:sp>
+      <p:sp>
+        <p:nvSpPr>
+          <p:cNvPr id="6" name="Rectangle: Rounded Corners 5">
+            <a:extLst>
+              <a:ext uri="{FF2B5EF4-FFF2-40B4-BE49-F238E27FC236}">
+                <a16:creationId xmlns:a16="http://schemas.microsoft.com/office/drawing/2014/main" id="{7D42B72A-DA70-D7C0-2644-F52A4B5989D6}"/>
+              </a:ext>
+            </a:extLst>
+          </p:cNvPr>
+          <p:cNvSpPr/>
+          <p:nvPr/>
+        </p:nvSpPr>
+        <p:spPr>
+          <a:xfrm>
+            <a:off x="2143125" y="3505200"/>
+            <a:ext cx="571500" cy="571500"/>
+          </a:xfrm>
+          <a:prstGeom prst="roundRect">
+            <a:avLst/>
+          </a:prstGeom>
+          <a:solidFill>
+            <a:srgbClr val="2C2C2C"/>
+          </a:solidFill>
+          <a:ln>
+            <a:noFill/>
+          </a:ln>
+        </p:spPr>
+        <p:style>
+          <a:lnRef idx="2">
+            <a:schemeClr val="accent1">
+              <a:shade val="15000"/>
+            </a:schemeClr>
+          </a:lnRef>
+          <a:fillRef idx="1">
+            <a:schemeClr val="accent1"/>
+          </a:fillRef>
+          <a:effectRef idx="0">
+            <a:schemeClr val="accent1"/>
+          </a:effectRef>
+          <a:fontRef idx="minor">
+            <a:schemeClr val="lt1"/>
+          </a:fontRef>
+        </p:style>
+        <p:txBody>
+          <a:bodyPr rtlCol="0" anchor="ctr"/>
+          <a:lstStyle/>
+          <a:p>
+            <a:pPr algn="ctr"/>
+            <a:endParaRPr lang="en-SE"/>
+          </a:p>
+        </p:txBody>
+      </p:sp>
+      <p:sp>
+        <p:nvSpPr>
+          <p:cNvPr id="8" name="Rectangle: Rounded Corners 7">
+            <a:extLst>
+              <a:ext uri="{FF2B5EF4-FFF2-40B4-BE49-F238E27FC236}">
+                <a16:creationId xmlns:a16="http://schemas.microsoft.com/office/drawing/2014/main" id="{56622E46-AF79-CBBA-3566-CA2B135F0BEB}"/>
+              </a:ext>
+            </a:extLst>
+          </p:cNvPr>
+          <p:cNvSpPr/>
+          <p:nvPr/>
+        </p:nvSpPr>
+        <p:spPr>
+          <a:xfrm>
+            <a:off x="828675" y="762000"/>
+            <a:ext cx="381000" cy="2381250"/>
+          </a:xfrm>
+          <a:prstGeom prst="roundRect">
+            <a:avLst>
+              <a:gd name="adj" fmla="val 50000"/>
+            </a:avLst>
+          </a:prstGeom>
+          <a:solidFill>
+            <a:schemeClr val="accent1">
+              <a:alpha val="80000"/>
+            </a:schemeClr>
+          </a:solidFill>
+          <a:ln>
+            <a:solidFill>
+              <a:srgbClr val="365B9D"/>
+            </a:solidFill>
+          </a:ln>
+        </p:spPr>
+        <p:style>
+          <a:lnRef idx="2">
+            <a:schemeClr val="accent1">
+              <a:shade val="15000"/>
+            </a:schemeClr>
+          </a:lnRef>
+          <a:fillRef idx="1">
+            <a:schemeClr val="accent1"/>
+          </a:fillRef>
+          <a:effectRef idx="0">
+            <a:schemeClr val="accent1"/>
+          </a:effectRef>
+          <a:fontRef idx="minor">
+            <a:schemeClr val="lt1"/>
+          </a:fontRef>
+        </p:style>
+        <p:txBody>
+          <a:bodyPr rtlCol="0" anchor="ctr"/>
+          <a:lstStyle/>
+          <a:p>
+            <a:pPr algn="ctr"/>
+            <a:endParaRPr lang="en-SE"/>
+          </a:p>
+        </p:txBody>
+      </p:sp>
+      <p:sp>
+        <p:nvSpPr>
+          <p:cNvPr id="9" name="Rectangle: Rounded Corners 8">
+            <a:extLst>
+              <a:ext uri="{FF2B5EF4-FFF2-40B4-BE49-F238E27FC236}">
+                <a16:creationId xmlns:a16="http://schemas.microsoft.com/office/drawing/2014/main" id="{DA4D4F0A-A9C3-9FF8-2F94-6B0D6547A9BC}"/>
+              </a:ext>
+            </a:extLst>
+          </p:cNvPr>
+          <p:cNvSpPr/>
+          <p:nvPr/>
+        </p:nvSpPr>
+        <p:spPr>
+          <a:xfrm>
+            <a:off x="1838325" y="762000"/>
+            <a:ext cx="381000" cy="2381250"/>
+          </a:xfrm>
+          <a:prstGeom prst="roundRect">
+            <a:avLst>
+              <a:gd name="adj" fmla="val 50000"/>
+            </a:avLst>
+          </a:prstGeom>
+          <a:solidFill>
+            <a:srgbClr val="666666">
+              <a:alpha val="80000"/>
+            </a:srgbClr>
+          </a:solidFill>
+        </p:spPr>
+        <p:style>
+          <a:lnRef idx="2">
+            <a:schemeClr val="accent1">
+              <a:shade val="15000"/>
+            </a:schemeClr>
+          </a:lnRef>
+          <a:fillRef idx="1">
+            <a:schemeClr val="accent1"/>
+          </a:fillRef>
+          <a:effectRef idx="0">
+            <a:schemeClr val="accent1"/>
+          </a:effectRef>
+          <a:fontRef idx="minor">
+            <a:schemeClr val="lt1"/>
+          </a:fontRef>
+        </p:style>
+        <p:txBody>
+          <a:bodyPr rtlCol="0" anchor="ctr"/>
+          <a:lstStyle/>
+          <a:p>
+            <a:pPr algn="ctr"/>
+            <a:endParaRPr lang="en-SE"/>
+          </a:p>
+        </p:txBody>
+      </p:sp>
+    </p:spTree>
+    <p:extLst>
+      <p:ext uri="{BB962C8B-B14F-4D97-AF65-F5344CB8AC3E}">
+        <p14:creationId xmlns:p14="http://schemas.microsoft.com/office/powerpoint/2010/main" val="220686341"/>
       </p:ext>
     </p:extLst>
   </p:cSld>
